--- a/material/Sesion-03-Blockchain-Web3.pptx
+++ b/material/Sesion-03-Blockchain-Web3.pptx
@@ -535,7 +535,7 @@
           <a:p>
             <a:r>
               <a:rPr lang="en-US" dirty="0"/>
-              <a:t/>
+              <a:t>Abrir con la plenaria de la pregunta de la semana: ¿qué le falta a un hash para demostrar además quién escribió el dato? Recoger dos o tres propuestas y anunciar que hoy se responde. Esta sesión cierra la parte técnica de la Unidad I. 3 minutos.</a:t>
             </a:r>
             <a:endParaRPr lang="en-US" dirty="0"/>
           </a:p>
@@ -1239,7 +1239,7 @@
           <a:p>
             <a:r>
               <a:rPr lang="en-US" dirty="0"/>
-              <a:t/>
+              <a:t>Min 78–118, después de la pausa. Ya están todas las piezas; ahora se ensamblan en un bloque. Pedir que tengan a mano la figura del bloque de la Sesión 1.</a:t>
             </a:r>
             <a:endParaRPr lang="en-US" dirty="0"/>
           </a:p>
@@ -1855,7 +1855,7 @@
           <a:p>
             <a:r>
               <a:rPr lang="en-US" dirty="0"/>
-              <a:t/>
+              <a:t>Min 118–170, en parejas. Laboratorio 02: claves y firmas, dirección y checksum, mini-blockchain. Verificar entornos y dependencia instalada antes de empezar. El error más común está en la serialización.</a:t>
             </a:r>
             <a:endParaRPr lang="en-US" dirty="0"/>
           </a:p>
@@ -2295,7 +2295,7 @@
           <a:p>
             <a:r>
               <a:rPr lang="en-US" dirty="0"/>
-              <a:t/>
+              <a:t>Min 170–180. Síntesis, entregable y el hueco que abre la Sesión 4. No abrir temas nuevos.</a:t>
             </a:r>
             <a:endParaRPr lang="en-US" dirty="0"/>
           </a:p>
@@ -2911,7 +2911,7 @@
           <a:p>
             <a:r>
               <a:rPr lang="en-US" dirty="0"/>
-              <a:t/>
+              <a:t>Cerrar con la próxima sesión: consenso y trilema, y el Quiz 1 de la Unidad I (sesiones 1 a 4). Entregable de hoy: la mini-blockchain con las pruebas pasando, antes de que empiece la Sesión 4. 1 minuto.</a:t>
             </a:r>
             <a:endParaRPr lang="en-US" dirty="0"/>
           </a:p>
@@ -2999,7 +2999,7 @@
           <a:p>
             <a:r>
               <a:rPr lang="en-US" dirty="0"/>
-              <a:t/>
+              <a:t>Min 10–70. Criptografía asimétrica sin matemática pesada: la idea, un ejemplo real y los errores de concepto típicos. Todo lo que se muestra aquí se programa en el bloque C.</a:t>
             </a:r>
             <a:endParaRPr lang="en-US" dirty="0"/>
           </a:p>
@@ -7154,7 +7154,7 @@
                   </a:tcPr>
                 </a:tc>
               </a:tr>
-              <a:tr h="722376">
+              <a:tr h="676656">
                 <a:tc>
                   <a:txBody>
                     <a:bodyPr/>
@@ -7292,7 +7292,7 @@
                   </a:tcPr>
                 </a:tc>
               </a:tr>
-              <a:tr h="722376">
+              <a:tr h="676656">
                 <a:tc>
                   <a:txBody>
                     <a:bodyPr/>
@@ -7430,7 +7430,7 @@
                   </a:tcPr>
                 </a:tc>
               </a:tr>
-              <a:tr h="722376">
+              <a:tr h="676656">
                 <a:tc>
                   <a:txBody>
                     <a:bodyPr/>
@@ -7568,7 +7568,7 @@
                   </a:tcPr>
                 </a:tc>
               </a:tr>
-              <a:tr h="722376">
+              <a:tr h="676656">
                 <a:tc>
                   <a:txBody>
                     <a:bodyPr/>
@@ -7719,7 +7719,7 @@
         <p:spPr>
           <a:xfrm>
             <a:off x="548640" y="1764792"/>
-            <a:ext cx="11094415" cy="3236976"/>
+            <a:ext cx="11094415" cy="3054096"/>
           </a:xfrm>
           <a:prstGeom prst="rect">
             <a:avLst/>
@@ -7740,8 +7740,8 @@
         </p:nvSpPr>
         <p:spPr>
           <a:xfrm>
-            <a:off x="566928" y="5166360"/>
-            <a:ext cx="11057839" cy="914400"/>
+            <a:off x="566928" y="4983480"/>
+            <a:ext cx="11057839" cy="1097280"/>
           </a:xfrm>
           <a:prstGeom prst="rect">
             <a:avLst/>
@@ -7780,7 +7780,7 @@
         </p:blipFill>
         <p:spPr>
           <a:xfrm>
-            <a:off x="804672" y="5385816"/>
+            <a:off x="804672" y="5202936"/>
             <a:ext cx="237744" cy="237744"/>
           </a:xfrm>
           <a:prstGeom prst="rect">
@@ -7796,7 +7796,7 @@
         </p:nvSpPr>
         <p:spPr>
           <a:xfrm>
-            <a:off x="1133856" y="5358384"/>
+            <a:off x="1133856" y="5175504"/>
             <a:ext cx="10234879" cy="292608"/>
           </a:xfrm>
           <a:prstGeom prst="rect">
@@ -7835,8 +7835,8 @@
         </p:nvSpPr>
         <p:spPr>
           <a:xfrm>
-            <a:off x="804672" y="5660136"/>
-            <a:ext cx="10582351" cy="384048"/>
+            <a:off x="804672" y="5477256"/>
+            <a:ext cx="10582351" cy="530352"/>
           </a:xfrm>
           <a:prstGeom prst="rect">
             <a:avLst/>
@@ -8129,7 +8129,7 @@
         <p:spPr>
           <a:xfrm>
             <a:off x="566928" y="1783080"/>
-            <a:ext cx="11057839" cy="2377440"/>
+            <a:ext cx="11057839" cy="2240280"/>
           </a:xfrm>
           <a:prstGeom prst="rect">
             <a:avLst/>
@@ -8307,8 +8307,8 @@
         </p:nvSpPr>
         <p:spPr>
           <a:xfrm>
-            <a:off x="566928" y="4343400"/>
-            <a:ext cx="11057839" cy="1051560"/>
+            <a:off x="566928" y="4160520"/>
+            <a:ext cx="11057839" cy="987552"/>
           </a:xfrm>
           <a:prstGeom prst="rect">
             <a:avLst/>
@@ -8339,7 +8339,7 @@
         </p:nvSpPr>
         <p:spPr>
           <a:xfrm>
-            <a:off x="841248" y="4526280"/>
+            <a:off x="841248" y="4279392"/>
             <a:ext cx="3657600" cy="274320"/>
           </a:xfrm>
           <a:prstGeom prst="rect">
@@ -8378,7 +8378,7 @@
         </p:nvSpPr>
         <p:spPr>
           <a:xfrm>
-            <a:off x="841248" y="4846320"/>
+            <a:off x="841248" y="4590288"/>
             <a:ext cx="10417759" cy="502920"/>
           </a:xfrm>
           <a:prstGeom prst="rect">
@@ -8420,8 +8420,8 @@
         </p:nvSpPr>
         <p:spPr>
           <a:xfrm>
-            <a:off x="566928" y="5532120"/>
-            <a:ext cx="11057839" cy="777240"/>
+            <a:off x="566928" y="5303520"/>
+            <a:ext cx="11057839" cy="822960"/>
           </a:xfrm>
           <a:prstGeom prst="rect">
             <a:avLst/>
@@ -8452,8 +8452,8 @@
         </p:nvSpPr>
         <p:spPr>
           <a:xfrm>
-            <a:off x="950976" y="5751576"/>
-            <a:ext cx="10289743" cy="338328"/>
+            <a:off x="950976" y="5522976"/>
+            <a:ext cx="10289743" cy="384048"/>
           </a:xfrm>
           <a:prstGeom prst="rect">
             <a:avLst/>
@@ -9514,7 +9514,7 @@
         <p:spPr>
           <a:xfrm>
             <a:off x="566928" y="1737360"/>
-            <a:ext cx="11057839" cy="2880360"/>
+            <a:ext cx="11057839" cy="2697480"/>
           </a:xfrm>
           <a:prstGeom prst="rect">
             <a:avLst/>
@@ -9651,7 +9651,7 @@
         <p:spPr>
           <a:xfrm>
             <a:off x="804672" y="3282696"/>
-            <a:ext cx="10582351" cy="1234440"/>
+            <a:ext cx="10582351" cy="1051560"/>
           </a:xfrm>
           <a:prstGeom prst="rect">
             <a:avLst/>
@@ -9682,8 +9682,8 @@
         </p:nvSpPr>
         <p:spPr>
           <a:xfrm>
-            <a:off x="1033272" y="3465576"/>
-            <a:ext cx="10125151" cy="914400"/>
+            <a:off x="1033272" y="3374136"/>
+            <a:ext cx="10125151" cy="868680"/>
           </a:xfrm>
           <a:prstGeom prst="rect">
             <a:avLst/>
@@ -9776,7 +9776,7 @@
         </p:nvSpPr>
         <p:spPr>
           <a:xfrm>
-            <a:off x="566928" y="4754880"/>
+            <a:off x="566928" y="4553712"/>
             <a:ext cx="11057839" cy="502920"/>
           </a:xfrm>
           <a:prstGeom prst="rect">
@@ -9818,8 +9818,8 @@
         </p:nvSpPr>
         <p:spPr>
           <a:xfrm>
-            <a:off x="566928" y="5285232"/>
-            <a:ext cx="11057839" cy="1051560"/>
+            <a:off x="566928" y="5138928"/>
+            <a:ext cx="11057839" cy="960120"/>
           </a:xfrm>
           <a:prstGeom prst="rect">
             <a:avLst/>
@@ -9858,7 +9858,7 @@
         </p:blipFill>
         <p:spPr>
           <a:xfrm>
-            <a:off x="804672" y="5504688"/>
+            <a:off x="804672" y="5358384"/>
             <a:ext cx="237744" cy="237744"/>
           </a:xfrm>
           <a:prstGeom prst="rect">
@@ -9874,7 +9874,7 @@
         </p:nvSpPr>
         <p:spPr>
           <a:xfrm>
-            <a:off x="1133856" y="5477256"/>
+            <a:off x="1133856" y="5330952"/>
             <a:ext cx="10234879" cy="292608"/>
           </a:xfrm>
           <a:prstGeom prst="rect">
@@ -9913,7 +9913,7 @@
         </p:nvSpPr>
         <p:spPr>
           <a:xfrm>
-            <a:off x="804672" y="5742432"/>
+            <a:off x="804672" y="5596128"/>
             <a:ext cx="10582351" cy="457200"/>
           </a:xfrm>
           <a:prstGeom prst="rect">
@@ -13120,7 +13120,7 @@
         </p:nvSpPr>
         <p:spPr>
           <a:xfrm>
-            <a:off x="566928" y="2148840"/>
+            <a:off x="566928" y="2057400"/>
             <a:ext cx="731520" cy="457200"/>
           </a:xfrm>
           <a:prstGeom prst="rect">
@@ -13159,7 +13159,7 @@
         </p:nvSpPr>
         <p:spPr>
           <a:xfrm>
-            <a:off x="1435608" y="2103120"/>
+            <a:off x="1435608" y="2011680"/>
             <a:ext cx="4754880" cy="365760"/>
           </a:xfrm>
           <a:prstGeom prst="rect">
@@ -13198,7 +13198,7 @@
         </p:nvSpPr>
         <p:spPr>
           <a:xfrm>
-            <a:off x="6327648" y="2084832"/>
+            <a:off x="6327648" y="1993392"/>
             <a:ext cx="5297119" cy="1005840"/>
           </a:xfrm>
           <a:prstGeom prst="rect">
@@ -13240,7 +13240,7 @@
         </p:nvSpPr>
         <p:spPr>
           <a:xfrm>
-            <a:off x="566928" y="1938528"/>
+            <a:off x="566928" y="1847088"/>
             <a:ext cx="11057839" cy="0"/>
           </a:xfrm>
           <a:prstGeom prst="line">
@@ -13263,7 +13263,7 @@
         </p:nvSpPr>
         <p:spPr>
           <a:xfrm>
-            <a:off x="566928" y="3383280"/>
+            <a:off x="566928" y="3154680"/>
             <a:ext cx="731520" cy="457200"/>
           </a:xfrm>
           <a:prstGeom prst="rect">
@@ -13302,7 +13302,7 @@
         </p:nvSpPr>
         <p:spPr>
           <a:xfrm>
-            <a:off x="1435608" y="3337560"/>
+            <a:off x="1435608" y="3108960"/>
             <a:ext cx="4754880" cy="365760"/>
           </a:xfrm>
           <a:prstGeom prst="rect">
@@ -13341,7 +13341,7 @@
         </p:nvSpPr>
         <p:spPr>
           <a:xfrm>
-            <a:off x="6327648" y="3319272"/>
+            <a:off x="6327648" y="3090672"/>
             <a:ext cx="5297119" cy="1005840"/>
           </a:xfrm>
           <a:prstGeom prst="rect">
@@ -13383,7 +13383,7 @@
         </p:nvSpPr>
         <p:spPr>
           <a:xfrm>
-            <a:off x="566928" y="3172968"/>
+            <a:off x="566928" y="2944368"/>
             <a:ext cx="11057839" cy="0"/>
           </a:xfrm>
           <a:prstGeom prst="line">
@@ -13406,7 +13406,7 @@
         </p:nvSpPr>
         <p:spPr>
           <a:xfrm>
-            <a:off x="566928" y="4617720"/>
+            <a:off x="566928" y="4251960"/>
             <a:ext cx="731520" cy="457200"/>
           </a:xfrm>
           <a:prstGeom prst="rect">
@@ -13445,7 +13445,7 @@
         </p:nvSpPr>
         <p:spPr>
           <a:xfrm>
-            <a:off x="1435608" y="4572000"/>
+            <a:off x="1435608" y="4206240"/>
             <a:ext cx="4754880" cy="365760"/>
           </a:xfrm>
           <a:prstGeom prst="rect">
@@ -13484,7 +13484,7 @@
         </p:nvSpPr>
         <p:spPr>
           <a:xfrm>
-            <a:off x="6327648" y="4553712"/>
+            <a:off x="6327648" y="4187952"/>
             <a:ext cx="5297119" cy="1005840"/>
           </a:xfrm>
           <a:prstGeom prst="rect">
@@ -13526,7 +13526,7 @@
         </p:nvSpPr>
         <p:spPr>
           <a:xfrm>
-            <a:off x="566928" y="4407408"/>
+            <a:off x="566928" y="4041648"/>
             <a:ext cx="11057839" cy="0"/>
           </a:xfrm>
           <a:prstGeom prst="line">
@@ -13549,7 +13549,7 @@
         </p:nvSpPr>
         <p:spPr>
           <a:xfrm>
-            <a:off x="566928" y="5641848"/>
+            <a:off x="566928" y="5138928"/>
             <a:ext cx="11057839" cy="0"/>
           </a:xfrm>
           <a:prstGeom prst="line">
@@ -13572,8 +13572,8 @@
         </p:nvSpPr>
         <p:spPr>
           <a:xfrm>
-            <a:off x="566928" y="5413248"/>
-            <a:ext cx="11057839" cy="914400"/>
+            <a:off x="566928" y="5285232"/>
+            <a:ext cx="11057839" cy="841248"/>
           </a:xfrm>
           <a:prstGeom prst="rect">
             <a:avLst/>
@@ -13612,7 +13612,7 @@
         </p:blipFill>
         <p:spPr>
           <a:xfrm>
-            <a:off x="804672" y="5632704"/>
+            <a:off x="804672" y="5504688"/>
             <a:ext cx="237744" cy="237744"/>
           </a:xfrm>
           <a:prstGeom prst="rect">
@@ -13628,7 +13628,7 @@
         </p:nvSpPr>
         <p:spPr>
           <a:xfrm>
-            <a:off x="1133856" y="5605272"/>
+            <a:off x="1133856" y="5477256"/>
             <a:ext cx="10234879" cy="292608"/>
           </a:xfrm>
           <a:prstGeom prst="rect">
@@ -13667,7 +13667,7 @@
         </p:nvSpPr>
         <p:spPr>
           <a:xfrm>
-            <a:off x="804672" y="5870448"/>
+            <a:off x="804672" y="5742432"/>
             <a:ext cx="10582351" cy="365760"/>
           </a:xfrm>
           <a:prstGeom prst="rect">
@@ -15954,8 +15954,8 @@
         </p:nvSpPr>
         <p:spPr>
           <a:xfrm>
-            <a:off x="566928" y="2468880"/>
-            <a:ext cx="11057839" cy="2377440"/>
+            <a:off x="566928" y="2423160"/>
+            <a:ext cx="11057839" cy="2606040"/>
           </a:xfrm>
           <a:prstGeom prst="rect">
             <a:avLst/>
@@ -15994,7 +15994,7 @@
         </p:blipFill>
         <p:spPr>
           <a:xfrm>
-            <a:off x="804672" y="2688336"/>
+            <a:off x="804672" y="2642616"/>
             <a:ext cx="237744" cy="237744"/>
           </a:xfrm>
           <a:prstGeom prst="rect">
@@ -16010,7 +16010,7 @@
         </p:nvSpPr>
         <p:spPr>
           <a:xfrm>
-            <a:off x="1133856" y="2660904"/>
+            <a:off x="1133856" y="2615184"/>
             <a:ext cx="10234879" cy="292608"/>
           </a:xfrm>
           <a:prstGeom prst="rect">
@@ -16049,7 +16049,7 @@
         </p:nvSpPr>
         <p:spPr>
           <a:xfrm>
-            <a:off x="804672" y="3054096"/>
+            <a:off x="804672" y="3008376"/>
             <a:ext cx="10582351" cy="731520"/>
           </a:xfrm>
           <a:prstGeom prst="rect">
@@ -16091,17 +16091,17 @@
         </p:nvSpPr>
         <p:spPr>
           <a:xfrm>
-            <a:off x="804672" y="3877056"/>
-            <a:ext cx="3017520" cy="292608"/>
-          </a:xfrm>
-          <a:prstGeom prst="rect">
-            <a:avLst/>
-          </a:prstGeom>
-          <a:noFill/>
-          <a:ln/>
-        </p:spPr>
-        <p:txBody>
-          <a:bodyPr wrap="square" lIns="0" tIns="0" rIns="0" bIns="0" rtlCol="0" anchor="ctr"/>
+            <a:off x="804672" y="3831336"/>
+            <a:ext cx="3017520" cy="274320"/>
+          </a:xfrm>
+          <a:prstGeom prst="rect">
+            <a:avLst/>
+          </a:prstGeom>
+          <a:noFill/>
+          <a:ln/>
+        </p:spPr>
+        <p:txBody>
+          <a:bodyPr wrap="square" lIns="0" tIns="0" rIns="0" bIns="0" rtlCol="0" anchor="t"/>
           <a:lstStyle/>
           <a:p>
             <a:pPr indent="0" marL="0">
@@ -16130,17 +16130,17 @@
         </p:nvSpPr>
         <p:spPr>
           <a:xfrm>
-            <a:off x="4005072" y="3877056"/>
-            <a:ext cx="7381951" cy="292608"/>
-          </a:xfrm>
-          <a:prstGeom prst="rect">
-            <a:avLst/>
-          </a:prstGeom>
-          <a:noFill/>
-          <a:ln/>
-        </p:spPr>
-        <p:txBody>
-          <a:bodyPr wrap="square" lIns="0" tIns="0" rIns="0" bIns="0" rtlCol="0" anchor="ctr"/>
+            <a:off x="4005072" y="3813048"/>
+            <a:ext cx="7381951" cy="402336"/>
+          </a:xfrm>
+          <a:prstGeom prst="rect">
+            <a:avLst/>
+          </a:prstGeom>
+          <a:noFill/>
+          <a:ln/>
+        </p:spPr>
+        <p:txBody>
+          <a:bodyPr wrap="square" lIns="0" tIns="0" rIns="0" bIns="0" rtlCol="0" anchor="t"/>
           <a:lstStyle/>
           <a:p>
             <a:pPr indent="0" marL="0">
@@ -16169,17 +16169,17 @@
         </p:nvSpPr>
         <p:spPr>
           <a:xfrm>
-            <a:off x="804672" y="4242816"/>
-            <a:ext cx="3017520" cy="292608"/>
-          </a:xfrm>
-          <a:prstGeom prst="rect">
-            <a:avLst/>
-          </a:prstGeom>
-          <a:noFill/>
-          <a:ln/>
-        </p:spPr>
-        <p:txBody>
-          <a:bodyPr wrap="square" lIns="0" tIns="0" rIns="0" bIns="0" rtlCol="0" anchor="ctr"/>
+            <a:off x="804672" y="4251960"/>
+            <a:ext cx="3017520" cy="274320"/>
+          </a:xfrm>
+          <a:prstGeom prst="rect">
+            <a:avLst/>
+          </a:prstGeom>
+          <a:noFill/>
+          <a:ln/>
+        </p:spPr>
+        <p:txBody>
+          <a:bodyPr wrap="square" lIns="0" tIns="0" rIns="0" bIns="0" rtlCol="0" anchor="t"/>
           <a:lstStyle/>
           <a:p>
             <a:pPr indent="0" marL="0">
@@ -16208,17 +16208,17 @@
         </p:nvSpPr>
         <p:spPr>
           <a:xfrm>
-            <a:off x="4005072" y="4242816"/>
-            <a:ext cx="7381951" cy="292608"/>
-          </a:xfrm>
-          <a:prstGeom prst="rect">
-            <a:avLst/>
-          </a:prstGeom>
-          <a:noFill/>
-          <a:ln/>
-        </p:spPr>
-        <p:txBody>
-          <a:bodyPr wrap="square" lIns="0" tIns="0" rIns="0" bIns="0" rtlCol="0" anchor="ctr"/>
+            <a:off x="4005072" y="4233672"/>
+            <a:ext cx="7381951" cy="402336"/>
+          </a:xfrm>
+          <a:prstGeom prst="rect">
+            <a:avLst/>
+          </a:prstGeom>
+          <a:noFill/>
+          <a:ln/>
+        </p:spPr>
+        <p:txBody>
+          <a:bodyPr wrap="square" lIns="0" tIns="0" rIns="0" bIns="0" rtlCol="0" anchor="t"/>
           <a:lstStyle/>
           <a:p>
             <a:pPr indent="0" marL="0">
@@ -16247,17 +16247,17 @@
         </p:nvSpPr>
         <p:spPr>
           <a:xfrm>
-            <a:off x="804672" y="4608576"/>
-            <a:ext cx="3017520" cy="292608"/>
-          </a:xfrm>
-          <a:prstGeom prst="rect">
-            <a:avLst/>
-          </a:prstGeom>
-          <a:noFill/>
-          <a:ln/>
-        </p:spPr>
-        <p:txBody>
-          <a:bodyPr wrap="square" lIns="0" tIns="0" rIns="0" bIns="0" rtlCol="0" anchor="ctr"/>
+            <a:off x="804672" y="4672584"/>
+            <a:ext cx="3017520" cy="274320"/>
+          </a:xfrm>
+          <a:prstGeom prst="rect">
+            <a:avLst/>
+          </a:prstGeom>
+          <a:noFill/>
+          <a:ln/>
+        </p:spPr>
+        <p:txBody>
+          <a:bodyPr wrap="square" lIns="0" tIns="0" rIns="0" bIns="0" rtlCol="0" anchor="t"/>
           <a:lstStyle/>
           <a:p>
             <a:pPr indent="0" marL="0">
@@ -16286,17 +16286,17 @@
         </p:nvSpPr>
         <p:spPr>
           <a:xfrm>
-            <a:off x="4005072" y="4608576"/>
-            <a:ext cx="7381951" cy="292608"/>
-          </a:xfrm>
-          <a:prstGeom prst="rect">
-            <a:avLst/>
-          </a:prstGeom>
-          <a:noFill/>
-          <a:ln/>
-        </p:spPr>
-        <p:txBody>
-          <a:bodyPr wrap="square" lIns="0" tIns="0" rIns="0" bIns="0" rtlCol="0" anchor="ctr"/>
+            <a:off x="4005072" y="4654296"/>
+            <a:ext cx="7381951" cy="402336"/>
+          </a:xfrm>
+          <a:prstGeom prst="rect">
+            <a:avLst/>
+          </a:prstGeom>
+          <a:noFill/>
+          <a:ln/>
+        </p:spPr>
+        <p:txBody>
+          <a:bodyPr wrap="square" lIns="0" tIns="0" rIns="0" bIns="0" rtlCol="0" anchor="t"/>
           <a:lstStyle/>
           <a:p>
             <a:pPr indent="0" marL="0">
@@ -16325,8 +16325,8 @@
         </p:nvSpPr>
         <p:spPr>
           <a:xfrm>
-            <a:off x="566928" y="5029200"/>
-            <a:ext cx="11057839" cy="1051560"/>
+            <a:off x="566928" y="5120640"/>
+            <a:ext cx="11057839" cy="1097280"/>
           </a:xfrm>
           <a:prstGeom prst="rect">
             <a:avLst/>
@@ -16365,7 +16365,7 @@
         </p:blipFill>
         <p:spPr>
           <a:xfrm>
-            <a:off x="804672" y="5248656"/>
+            <a:off x="804672" y="5340096"/>
             <a:ext cx="237744" cy="237744"/>
           </a:xfrm>
           <a:prstGeom prst="rect">
@@ -16381,7 +16381,7 @@
         </p:nvSpPr>
         <p:spPr>
           <a:xfrm>
-            <a:off x="1133856" y="5221224"/>
+            <a:off x="1133856" y="5312664"/>
             <a:ext cx="10234879" cy="292608"/>
           </a:xfrm>
           <a:prstGeom prst="rect">
@@ -16420,7 +16420,7 @@
         </p:nvSpPr>
         <p:spPr>
           <a:xfrm>
-            <a:off x="804672" y="5559552"/>
+            <a:off x="804672" y="5650992"/>
             <a:ext cx="10582351" cy="502920"/>
           </a:xfrm>
           <a:prstGeom prst="rect">
@@ -18488,7 +18488,7 @@
         </p:nvSpPr>
         <p:spPr>
           <a:xfrm>
-            <a:off x="566928" y="1819656"/>
+            <a:off x="566928" y="1773936"/>
             <a:ext cx="685800" cy="457200"/>
           </a:xfrm>
           <a:prstGeom prst="rect">
@@ -18527,7 +18527,7 @@
         </p:nvSpPr>
         <p:spPr>
           <a:xfrm>
-            <a:off x="1344168" y="1783080"/>
+            <a:off x="1344168" y="1737360"/>
             <a:ext cx="10280599" cy="329184"/>
           </a:xfrm>
           <a:prstGeom prst="rect">
@@ -18566,8 +18566,8 @@
         </p:nvSpPr>
         <p:spPr>
           <a:xfrm>
-            <a:off x="1344168" y="2148840"/>
-            <a:ext cx="10280599" cy="658368"/>
+            <a:off x="1344168" y="2084832"/>
+            <a:ext cx="10280599" cy="603504"/>
           </a:xfrm>
           <a:prstGeom prst="rect">
             <a:avLst/>
@@ -18608,7 +18608,7 @@
         </p:nvSpPr>
         <p:spPr>
           <a:xfrm>
-            <a:off x="566928" y="1655064"/>
+            <a:off x="566928" y="1627632"/>
             <a:ext cx="11057839" cy="0"/>
           </a:xfrm>
           <a:prstGeom prst="line">
@@ -18631,7 +18631,7 @@
         </p:nvSpPr>
         <p:spPr>
           <a:xfrm>
-            <a:off x="566928" y="2916936"/>
+            <a:off x="566928" y="2798064"/>
             <a:ext cx="685800" cy="457200"/>
           </a:xfrm>
           <a:prstGeom prst="rect">
@@ -18670,7 +18670,7 @@
         </p:nvSpPr>
         <p:spPr>
           <a:xfrm>
-            <a:off x="1344168" y="2880360"/>
+            <a:off x="1344168" y="2761488"/>
             <a:ext cx="10280599" cy="329184"/>
           </a:xfrm>
           <a:prstGeom prst="rect">
@@ -18709,8 +18709,8 @@
         </p:nvSpPr>
         <p:spPr>
           <a:xfrm>
-            <a:off x="1344168" y="3246120"/>
-            <a:ext cx="10280599" cy="658368"/>
+            <a:off x="1344168" y="3108960"/>
+            <a:ext cx="10280599" cy="603504"/>
           </a:xfrm>
           <a:prstGeom prst="rect">
             <a:avLst/>
@@ -18751,7 +18751,7 @@
         </p:nvSpPr>
         <p:spPr>
           <a:xfrm>
-            <a:off x="566928" y="2752344"/>
+            <a:off x="566928" y="2651760"/>
             <a:ext cx="11057839" cy="0"/>
           </a:xfrm>
           <a:prstGeom prst="line">
@@ -18774,7 +18774,7 @@
         </p:nvSpPr>
         <p:spPr>
           <a:xfrm>
-            <a:off x="566928" y="4014216"/>
+            <a:off x="566928" y="3822192"/>
             <a:ext cx="685800" cy="457200"/>
           </a:xfrm>
           <a:prstGeom prst="rect">
@@ -18813,7 +18813,7 @@
         </p:nvSpPr>
         <p:spPr>
           <a:xfrm>
-            <a:off x="1344168" y="3977640"/>
+            <a:off x="1344168" y="3785616"/>
             <a:ext cx="10280599" cy="329184"/>
           </a:xfrm>
           <a:prstGeom prst="rect">
@@ -18852,8 +18852,8 @@
         </p:nvSpPr>
         <p:spPr>
           <a:xfrm>
-            <a:off x="1344168" y="4343400"/>
-            <a:ext cx="10280599" cy="658368"/>
+            <a:off x="1344168" y="4133088"/>
+            <a:ext cx="10280599" cy="603504"/>
           </a:xfrm>
           <a:prstGeom prst="rect">
             <a:avLst/>
@@ -18894,7 +18894,7 @@
         </p:nvSpPr>
         <p:spPr>
           <a:xfrm>
-            <a:off x="566928" y="3849624"/>
+            <a:off x="566928" y="3675888"/>
             <a:ext cx="11057839" cy="0"/>
           </a:xfrm>
           <a:prstGeom prst="line">
@@ -18917,7 +18917,7 @@
         </p:nvSpPr>
         <p:spPr>
           <a:xfrm>
-            <a:off x="566928" y="5111496"/>
+            <a:off x="566928" y="4846320"/>
             <a:ext cx="685800" cy="457200"/>
           </a:xfrm>
           <a:prstGeom prst="rect">
@@ -18956,7 +18956,7 @@
         </p:nvSpPr>
         <p:spPr>
           <a:xfrm>
-            <a:off x="1344168" y="5074920"/>
+            <a:off x="1344168" y="4809744"/>
             <a:ext cx="10280599" cy="329184"/>
           </a:xfrm>
           <a:prstGeom prst="rect">
@@ -18995,8 +18995,8 @@
         </p:nvSpPr>
         <p:spPr>
           <a:xfrm>
-            <a:off x="1344168" y="5440680"/>
-            <a:ext cx="10280599" cy="658368"/>
+            <a:off x="1344168" y="5157216"/>
+            <a:ext cx="10280599" cy="603504"/>
           </a:xfrm>
           <a:prstGeom prst="rect">
             <a:avLst/>
@@ -19037,7 +19037,7 @@
         </p:nvSpPr>
         <p:spPr>
           <a:xfrm>
-            <a:off x="566928" y="4946904"/>
+            <a:off x="566928" y="4700016"/>
             <a:ext cx="11057839" cy="0"/>
           </a:xfrm>
           <a:prstGeom prst="line">
@@ -19060,7 +19060,7 @@
         </p:nvSpPr>
         <p:spPr>
           <a:xfrm>
-            <a:off x="566928" y="6044184"/>
+            <a:off x="566928" y="5724144"/>
             <a:ext cx="11057839" cy="0"/>
           </a:xfrm>
           <a:prstGeom prst="line">
@@ -19083,7 +19083,7 @@
         </p:nvSpPr>
         <p:spPr>
           <a:xfrm>
-            <a:off x="566928" y="6172200"/>
+            <a:off x="566928" y="5852160"/>
             <a:ext cx="11057839" cy="274320"/>
           </a:xfrm>
           <a:prstGeom prst="rect">
@@ -30408,7 +30408,7 @@
         <p:spPr>
           <a:xfrm>
             <a:off x="566928" y="2651760"/>
-            <a:ext cx="11057839" cy="1737360"/>
+            <a:ext cx="11057839" cy="1874520"/>
           </a:xfrm>
           <a:prstGeom prst="rect">
             <a:avLst/>
@@ -30586,7 +30586,7 @@
           </p:nvPr>
         </p:nvGraphicFramePr>
         <p:xfrm>
-          <a:off x="566928" y="4617720"/>
+          <a:off x="566928" y="4681728"/>
           <a:ext cx="11057839" cy="914400"/>
         </p:xfrm>
         <a:graphic>
@@ -30735,7 +30735,7 @@
                   </a:tcPr>
                 </a:tc>
               </a:tr>
-              <a:tr h="530352">
+              <a:tr h="507492">
                 <a:tc>
                   <a:txBody>
                     <a:bodyPr/>
@@ -30873,7 +30873,7 @@
                   </a:tcPr>
                 </a:tc>
               </a:tr>
-              <a:tr h="530352">
+              <a:tr h="507492">
                 <a:tc>
                   <a:txBody>
                     <a:bodyPr/>
@@ -31023,8 +31023,8 @@
         </p:nvSpPr>
         <p:spPr>
           <a:xfrm>
-            <a:off x="548640" y="4599432"/>
-            <a:ext cx="11094415" cy="1408176"/>
+            <a:off x="548640" y="4663440"/>
+            <a:ext cx="11094415" cy="1362456"/>
           </a:xfrm>
           <a:prstGeom prst="rect">
             <a:avLst/>
